--- a/Week10_NetworkCommunication.pptx
+++ b/Week10_NetworkCommunication.pptx
@@ -4863,8 +4863,8 @@
         </p:nvSpPr>
         <p:spPr>
           <a:xfrm>
-            <a:off x="731520" y="365760"/>
-            <a:ext cx="2743200" cy="548640"/>
+            <a:off x="731520" y="228600"/>
+            <a:ext cx="1828800" cy="502920"/>
           </a:xfrm>
           <a:prstGeom prst="rect">
             <a:avLst/>
@@ -4878,7 +4878,7 @@
           <a:lstStyle/>
           <a:p>
             <a:pPr>
-              <a:defRPr sz="2800" b="1">
+              <a:defRPr sz="2600" b="1">
                 <a:solidFill>
                   <a:srgbClr val="0EA5E9"/>
                 </a:solidFill>
@@ -4899,8 +4899,8 @@
         </p:nvSpPr>
         <p:spPr>
           <a:xfrm>
-            <a:off x="731520" y="1097280"/>
-            <a:ext cx="7680960" cy="3657600"/>
+            <a:off x="731520" y="713232"/>
+            <a:ext cx="5486400" cy="320040"/>
           </a:xfrm>
           <a:prstGeom prst="rect">
             <a:avLst/>
@@ -4908,6 +4908,42 @@
           <a:noFill/>
         </p:spPr>
         <p:txBody>
+          <a:bodyPr wrap="none">
+            <a:spAutoFit/>
+          </a:bodyPr>
+          <a:lstStyle/>
+          <a:p>
+            <a:pPr>
+              <a:defRPr sz="1300">
+                <a:solidFill>
+                  <a:srgbClr val="CADCFC"/>
+                </a:solidFill>
+                <a:latin typeface="Calibri"/>
+              </a:defRPr>
+            </a:pPr>
+            <a:r>
+              <a:t>Week 10 — 다음 질문에 답해 보세요</a:t>
+            </a:r>
+          </a:p>
+        </p:txBody>
+      </p:sp>
+      <p:sp>
+        <p:nvSpPr>
+          <p:cNvPr id="6" name="TextBox 5"/>
+          <p:cNvSpPr txBox="1"/>
+          <p:nvPr/>
+        </p:nvSpPr>
+        <p:spPr>
+          <a:xfrm>
+            <a:off x="731520" y="1115568"/>
+            <a:ext cx="5029200" cy="3474720"/>
+          </a:xfrm>
+          <a:prstGeom prst="rect">
+            <a:avLst/>
+          </a:prstGeom>
+          <a:noFill/>
+        </p:spPr>
+        <p:txBody>
           <a:bodyPr wrap="square">
             <a:spAutoFit/>
           </a:bodyPr>
@@ -4915,9 +4951,9 @@
           <a:p>
             <a:pPr>
               <a:spcAft>
-                <a:spcPts val="1400"/>
-              </a:spcAft>
-              <a:defRPr sz="1600">
+                <a:spcPts val="1000"/>
+              </a:spcAft>
+              <a:defRPr sz="1400">
                 <a:solidFill>
                   <a:srgbClr val="FFFFFF"/>
                 </a:solidFill>
@@ -4925,15 +4961,15 @@
               </a:defRPr>
             </a:pPr>
             <a:r>
-              <a:t>Q1. 포트(Port)의 개념과 범위는?</a:t>
+              <a:t>Q1. UDP와 TCP의 가장 큰 차이는 무엇인가? 각각 언제 쓰는가?</a:t>
             </a:r>
           </a:p>
           <a:p>
             <a:pPr>
               <a:spcAft>
-                <a:spcPts val="1400"/>
-              </a:spcAft>
-              <a:defRPr sz="1600">
+                <a:spcPts val="1000"/>
+              </a:spcAft>
+              <a:defRPr sz="1400">
                 <a:solidFill>
                   <a:srgbClr val="FFFFFF"/>
                 </a:solidFill>
@@ -4941,15 +4977,15 @@
               </a:defRPr>
             </a:pPr>
             <a:r>
-              <a:t>Q2. UDP와 TCP의 가장 큰 차이는?</a:t>
+              <a:t>Q2. `ServerSocket`과 `Socket`의 역할은 어떻게 다른가?</a:t>
             </a:r>
           </a:p>
           <a:p>
             <a:pPr>
               <a:spcAft>
-                <a:spcPts val="1400"/>
-              </a:spcAft>
-              <a:defRPr sz="1600">
+                <a:spcPts val="1000"/>
+              </a:spcAft>
+              <a:defRPr sz="1400">
                 <a:solidFill>
                   <a:srgbClr val="FFFFFF"/>
                 </a:solidFill>
@@ -4957,15 +4993,15 @@
               </a:defRPr>
             </a:pPr>
             <a:r>
-              <a:t>Q3. 연결 지향 vs 비연결 지향의 예시는?</a:t>
+              <a:t>Q3. `CountDownLatch`를 왜 사용했는가? 없으면 어떤 문제가 생기는가?</a:t>
             </a:r>
           </a:p>
           <a:p>
             <a:pPr>
               <a:spcAft>
-                <a:spcPts val="1400"/>
-              </a:spcAft>
-              <a:defRPr sz="1600">
+                <a:spcPts val="1000"/>
+              </a:spcAft>
+              <a:defRPr sz="1400">
                 <a:solidFill>
                   <a:srgbClr val="FFFFFF"/>
                 </a:solidFill>
@@ -4973,23 +5009,173 @@
               </a:defRPr>
             </a:pPr>
             <a:r>
-              <a:t>Q4. ServerSocket.accept() 호출 후 어떤 상태?</a:t>
-            </a:r>
-          </a:p>
+              <a:t>Q4. `broadcast()`에서 `synchronized`가 필요한 이유는 무엇인가?</a:t>
+            </a:r>
+          </a:p>
+        </p:txBody>
+      </p:sp>
+      <p:sp>
+        <p:nvSpPr>
+          <p:cNvPr id="7" name="Rectangle 6"/>
+          <p:cNvSpPr/>
+          <p:nvPr/>
+        </p:nvSpPr>
+        <p:spPr>
+          <a:xfrm>
+            <a:off x="5943600" y="1115568"/>
+            <a:ext cx="27432" cy="3474720"/>
+          </a:xfrm>
+          <a:prstGeom prst="rect">
+            <a:avLst/>
+          </a:prstGeom>
+          <a:solidFill>
+            <a:srgbClr val="3B527E"/>
+          </a:solidFill>
+          <a:ln>
+            <a:noFill/>
+          </a:ln>
+        </p:spPr>
+        <p:style>
+          <a:lnRef idx="1">
+            <a:schemeClr val="accent1"/>
+          </a:lnRef>
+          <a:fillRef idx="3">
+            <a:schemeClr val="accent1"/>
+          </a:fillRef>
+          <a:effectRef idx="2">
+            <a:schemeClr val="accent1"/>
+          </a:effectRef>
+          <a:fontRef idx="minor">
+            <a:schemeClr val="lt1"/>
+          </a:fontRef>
+        </p:style>
+        <p:txBody>
+          <a:bodyPr rtlCol="0" anchor="ctr"/>
+          <a:lstStyle/>
+          <a:p>
+            <a:pPr algn="ctr"/>
+          </a:p>
+        </p:txBody>
+      </p:sp>
+      <p:sp>
+        <p:nvSpPr>
+          <p:cNvPr id="8" name="TextBox 7"/>
+          <p:cNvSpPr txBox="1"/>
+          <p:nvPr/>
+        </p:nvSpPr>
+        <p:spPr>
+          <a:xfrm>
+            <a:off x="6080760" y="1115568"/>
+            <a:ext cx="2834640" cy="365760"/>
+          </a:xfrm>
+          <a:prstGeom prst="rect">
+            <a:avLst/>
+          </a:prstGeom>
+          <a:noFill/>
+        </p:spPr>
+        <p:txBody>
+          <a:bodyPr wrap="none">
+            <a:spAutoFit/>
+          </a:bodyPr>
+          <a:lstStyle/>
           <a:p>
             <a:pPr>
-              <a:spcAft>
-                <a:spcPts val="1400"/>
-              </a:spcAft>
-              <a:defRPr sz="1600">
-                <a:solidFill>
-                  <a:srgbClr val="FFFFFF"/>
+              <a:defRPr sz="1400" b="1">
+                <a:solidFill>
+                  <a:srgbClr val="0EA5E9"/>
+                </a:solidFill>
+                <a:latin typeface="Georgia"/>
+              </a:defRPr>
+            </a:pPr>
+            <a:r>
+              <a:t>추가 실습</a:t>
+            </a:r>
+          </a:p>
+        </p:txBody>
+      </p:sp>
+      <p:sp>
+        <p:nvSpPr>
+          <p:cNvPr id="9" name="TextBox 8"/>
+          <p:cNvSpPr txBox="1"/>
+          <p:nvPr/>
+        </p:nvSpPr>
+        <p:spPr>
+          <a:xfrm>
+            <a:off x="6080760" y="1499616"/>
+            <a:ext cx="2834640" cy="3108960"/>
+          </a:xfrm>
+          <a:prstGeom prst="rect">
+            <a:avLst/>
+          </a:prstGeom>
+          <a:noFill/>
+        </p:spPr>
+        <p:txBody>
+          <a:bodyPr wrap="square">
+            <a:spAutoFit/>
+          </a:bodyPr>
+          <a:lstStyle/>
+          <a:p>
+            <a:pPr>
+              <a:spcAft>
+                <a:spcPts val="800"/>
+              </a:spcAft>
+              <a:defRPr sz="1200">
+                <a:solidFill>
+                  <a:srgbClr val="CADCFC"/>
                 </a:solidFill>
                 <a:latin typeface="Calibri"/>
               </a:defRPr>
             </a:pPr>
             <a:r>
-              <a:t>Q5. 멀티 클라이언트 서버에서 스레드가 필요한 이유는?</a:t>
+              <a:t>① ex01에서 UDP 메시지를 두 번 연속 보내고 결과 확인하기</a:t>
+            </a:r>
+          </a:p>
+          <a:p>
+            <a:pPr>
+              <a:spcAft>
+                <a:spcPts val="800"/>
+              </a:spcAft>
+              <a:defRPr sz="1200">
+                <a:solidFill>
+                  <a:srgbClr val="CADCFC"/>
+                </a:solidFill>
+                <a:latin typeface="Calibri"/>
+              </a:defRPr>
+            </a:pPr>
+            <a:r>
+              <a:t>② ex02에서 다른 문자열을 보내 Echo 응답 결과 확인하기</a:t>
+            </a:r>
+          </a:p>
+          <a:p>
+            <a:pPr>
+              <a:spcAft>
+                <a:spcPts val="800"/>
+              </a:spcAft>
+              <a:defRPr sz="1200">
+                <a:solidFill>
+                  <a:srgbClr val="CADCFC"/>
+                </a:solidFill>
+                <a:latin typeface="Calibri"/>
+              </a:defRPr>
+            </a:pPr>
+            <a:r>
+              <a:t>③ ex03에 현재 접속자 수를 출력하는 로직 추가하기</a:t>
+            </a:r>
+          </a:p>
+          <a:p>
+            <a:pPr>
+              <a:spcAft>
+                <a:spcPts val="800"/>
+              </a:spcAft>
+              <a:defRPr sz="1200">
+                <a:solidFill>
+                  <a:srgbClr val="CADCFC"/>
+                </a:solidFill>
+                <a:latin typeface="Calibri"/>
+              </a:defRPr>
+            </a:pPr>
+            <a:r>
+              <a:t>④ `startServer()`를 실제로 호출해 간단 채팅 서버로 테스트하기</a:t>
             </a:r>
           </a:p>
         </p:txBody>
